--- a/documents/Solar_Anomaly_Detection_Presentation.pptx
+++ b/documents/Solar_Anomaly_Detection_Presentation.pptx
@@ -35,8 +35,13 @@
     <p:sldId id="279" r:id="rId29"/>
     <p:sldId id="280" r:id="rId30"/>
     <p:sldId id="281" r:id="rId31"/>
-    <p:sldId id="283" r:id="rId32"/>
-    <p:sldId id="288" r:id="rId33"/>
+    <p:sldId id="291" r:id="rId32"/>
+    <p:sldId id="289" r:id="rId33"/>
+    <p:sldId id="290" r:id="rId34"/>
+    <p:sldId id="292" r:id="rId35"/>
+    <p:sldId id="293" r:id="rId36"/>
+    <p:sldId id="283" r:id="rId37"/>
+    <p:sldId id="288" r:id="rId38"/>
   </p:sldIdLst>
   <p:sldSz cx="12192000" cy="6858000"/>
   <p:notesSz cx="6858000" cy="9144000"/>
@@ -333,7 +338,7 @@
           <a:p>
             <a:fld id="{5BCAD085-E8A6-8845-BD4E-CB4CCA059FC4}" type="datetimeFigureOut">
               <a:rPr lang="en-US" smtClean="0"/>
-              <a:t>3/28/2026</a:t>
+              <a:t>3/29/2026</a:t>
             </a:fld>
             <a:endParaRPr lang="en-US"/>
           </a:p>
@@ -501,7 +506,7 @@
           <a:p>
             <a:fld id="{5BCAD085-E8A6-8845-BD4E-CB4CCA059FC4}" type="datetimeFigureOut">
               <a:rPr lang="en-US" smtClean="0"/>
-              <a:t>3/28/2026</a:t>
+              <a:t>3/29/2026</a:t>
             </a:fld>
             <a:endParaRPr lang="en-US"/>
           </a:p>
@@ -679,7 +684,7 @@
           <a:p>
             <a:fld id="{5BCAD085-E8A6-8845-BD4E-CB4CCA059FC4}" type="datetimeFigureOut">
               <a:rPr lang="en-US" smtClean="0"/>
-              <a:t>3/28/2026</a:t>
+              <a:t>3/29/2026</a:t>
             </a:fld>
             <a:endParaRPr lang="en-US"/>
           </a:p>
@@ -847,7 +852,7 @@
           <a:p>
             <a:fld id="{5BCAD085-E8A6-8845-BD4E-CB4CCA059FC4}" type="datetimeFigureOut">
               <a:rPr lang="en-US" smtClean="0"/>
-              <a:t>3/28/2026</a:t>
+              <a:t>3/29/2026</a:t>
             </a:fld>
             <a:endParaRPr lang="en-US"/>
           </a:p>
@@ -1092,7 +1097,7 @@
           <a:p>
             <a:fld id="{5BCAD085-E8A6-8845-BD4E-CB4CCA059FC4}" type="datetimeFigureOut">
               <a:rPr lang="en-US" smtClean="0"/>
-              <a:t>3/28/2026</a:t>
+              <a:t>3/29/2026</a:t>
             </a:fld>
             <a:endParaRPr lang="en-US"/>
           </a:p>
@@ -1377,7 +1382,7 @@
           <a:p>
             <a:fld id="{5BCAD085-E8A6-8845-BD4E-CB4CCA059FC4}" type="datetimeFigureOut">
               <a:rPr lang="en-US" smtClean="0"/>
-              <a:t>3/28/2026</a:t>
+              <a:t>3/29/2026</a:t>
             </a:fld>
             <a:endParaRPr lang="en-US"/>
           </a:p>
@@ -1796,7 +1801,7 @@
           <a:p>
             <a:fld id="{5BCAD085-E8A6-8845-BD4E-CB4CCA059FC4}" type="datetimeFigureOut">
               <a:rPr lang="en-US" smtClean="0"/>
-              <a:t>3/28/2026</a:t>
+              <a:t>3/29/2026</a:t>
             </a:fld>
             <a:endParaRPr lang="en-US"/>
           </a:p>
@@ -1913,7 +1918,7 @@
           <a:p>
             <a:fld id="{5BCAD085-E8A6-8845-BD4E-CB4CCA059FC4}" type="datetimeFigureOut">
               <a:rPr lang="en-US" smtClean="0"/>
-              <a:t>3/28/2026</a:t>
+              <a:t>3/29/2026</a:t>
             </a:fld>
             <a:endParaRPr lang="en-US"/>
           </a:p>
@@ -2008,7 +2013,7 @@
           <a:p>
             <a:fld id="{5BCAD085-E8A6-8845-BD4E-CB4CCA059FC4}" type="datetimeFigureOut">
               <a:rPr lang="en-US" smtClean="0"/>
-              <a:t>3/28/2026</a:t>
+              <a:t>3/29/2026</a:t>
             </a:fld>
             <a:endParaRPr lang="en-US"/>
           </a:p>
@@ -2283,7 +2288,7 @@
           <a:p>
             <a:fld id="{5BCAD085-E8A6-8845-BD4E-CB4CCA059FC4}" type="datetimeFigureOut">
               <a:rPr lang="en-US" smtClean="0"/>
-              <a:t>3/28/2026</a:t>
+              <a:t>3/29/2026</a:t>
             </a:fld>
             <a:endParaRPr lang="en-US"/>
           </a:p>
@@ -2535,7 +2540,7 @@
           <a:p>
             <a:fld id="{5BCAD085-E8A6-8845-BD4E-CB4CCA059FC4}" type="datetimeFigureOut">
               <a:rPr lang="en-US" smtClean="0"/>
-              <a:t>3/28/2026</a:t>
+              <a:t>3/29/2026</a:t>
             </a:fld>
             <a:endParaRPr lang="en-US"/>
           </a:p>
@@ -2746,7 +2751,7 @@
           <a:p>
             <a:fld id="{5BCAD085-E8A6-8845-BD4E-CB4CCA059FC4}" type="datetimeFigureOut">
               <a:rPr lang="en-US" smtClean="0"/>
-              <a:t>3/28/2026</a:t>
+              <a:t>3/29/2026</a:t>
             </a:fld>
             <a:endParaRPr lang="en-US"/>
           </a:p>
@@ -14986,6 +14991,306 @@
           <a:chExt cx="0" cy="0"/>
         </a:xfrm>
       </p:grpSpPr>
+      <p:pic>
+        <p:nvPicPr>
+          <p:cNvPr id="3" name="Picture 2">
+            <a:extLst>
+              <a:ext uri="{FF2B5EF4-FFF2-40B4-BE49-F238E27FC236}">
+                <a16:creationId xmlns:a16="http://schemas.microsoft.com/office/drawing/2014/main" id="{21FB576C-9805-E5B4-818F-F456F11EA6D8}"/>
+              </a:ext>
+            </a:extLst>
+          </p:cNvPr>
+          <p:cNvPicPr>
+            <a:picLocks noChangeAspect="1"/>
+          </p:cNvPicPr>
+          <p:nvPr/>
+        </p:nvPicPr>
+        <p:blipFill>
+          <a:blip r:embed="rId2"/>
+          <a:stretch>
+            <a:fillRect/>
+          </a:stretch>
+        </p:blipFill>
+        <p:spPr>
+          <a:xfrm>
+            <a:off x="1070152" y="785524"/>
+            <a:ext cx="4801270" cy="1924319"/>
+          </a:xfrm>
+          <a:prstGeom prst="rect">
+            <a:avLst/>
+          </a:prstGeom>
+        </p:spPr>
+      </p:pic>
+    </p:spTree>
+    <p:extLst>
+      <p:ext uri="{BB962C8B-B14F-4D97-AF65-F5344CB8AC3E}">
+        <p14:creationId xmlns:p14="http://schemas.microsoft.com/office/powerpoint/2010/main" val="3470821933"/>
+      </p:ext>
+    </p:extLst>
+  </p:cSld>
+  <p:clrMapOvr>
+    <a:masterClrMapping/>
+  </p:clrMapOvr>
+</p:sld>
+</file>
+
+<file path=ppt/slides/slide32.xml><?xml version="1.0" encoding="utf-8"?>
+<p:sld xmlns:a="http://schemas.openxmlformats.org/drawingml/2006/main" xmlns:r="http://schemas.openxmlformats.org/officeDocument/2006/relationships" xmlns:p="http://schemas.openxmlformats.org/presentationml/2006/main">
+  <p:cSld>
+    <p:spTree>
+      <p:nvGrpSpPr>
+        <p:cNvPr id="1" name=""/>
+        <p:cNvGrpSpPr/>
+        <p:nvPr/>
+      </p:nvGrpSpPr>
+      <p:grpSpPr>
+        <a:xfrm>
+          <a:off x="0" y="0"/>
+          <a:ext cx="0" cy="0"/>
+          <a:chOff x="0" y="0"/>
+          <a:chExt cx="0" cy="0"/>
+        </a:xfrm>
+      </p:grpSpPr>
+      <p:pic>
+        <p:nvPicPr>
+          <p:cNvPr id="3" name="Picture 2">
+            <a:extLst>
+              <a:ext uri="{FF2B5EF4-FFF2-40B4-BE49-F238E27FC236}">
+                <a16:creationId xmlns:a16="http://schemas.microsoft.com/office/drawing/2014/main" id="{002C5553-74AF-D552-69A1-BD5758542097}"/>
+              </a:ext>
+            </a:extLst>
+          </p:cNvPr>
+          <p:cNvPicPr>
+            <a:picLocks noChangeAspect="1"/>
+          </p:cNvPicPr>
+          <p:nvPr/>
+        </p:nvPicPr>
+        <p:blipFill>
+          <a:blip r:embed="rId2"/>
+          <a:stretch>
+            <a:fillRect/>
+          </a:stretch>
+        </p:blipFill>
+        <p:spPr>
+          <a:xfrm>
+            <a:off x="32491" y="1242707"/>
+            <a:ext cx="12127017" cy="4372585"/>
+          </a:xfrm>
+          <a:prstGeom prst="rect">
+            <a:avLst/>
+          </a:prstGeom>
+        </p:spPr>
+      </p:pic>
+    </p:spTree>
+    <p:extLst>
+      <p:ext uri="{BB962C8B-B14F-4D97-AF65-F5344CB8AC3E}">
+        <p14:creationId xmlns:p14="http://schemas.microsoft.com/office/powerpoint/2010/main" val="2677174925"/>
+      </p:ext>
+    </p:extLst>
+  </p:cSld>
+  <p:clrMapOvr>
+    <a:masterClrMapping/>
+  </p:clrMapOvr>
+</p:sld>
+</file>
+
+<file path=ppt/slides/slide33.xml><?xml version="1.0" encoding="utf-8"?>
+<p:sld xmlns:a="http://schemas.openxmlformats.org/drawingml/2006/main" xmlns:r="http://schemas.openxmlformats.org/officeDocument/2006/relationships" xmlns:p="http://schemas.openxmlformats.org/presentationml/2006/main">
+  <p:cSld>
+    <p:spTree>
+      <p:nvGrpSpPr>
+        <p:cNvPr id="1" name=""/>
+        <p:cNvGrpSpPr/>
+        <p:nvPr/>
+      </p:nvGrpSpPr>
+      <p:grpSpPr>
+        <a:xfrm>
+          <a:off x="0" y="0"/>
+          <a:ext cx="0" cy="0"/>
+          <a:chOff x="0" y="0"/>
+          <a:chExt cx="0" cy="0"/>
+        </a:xfrm>
+      </p:grpSpPr>
+      <p:pic>
+        <p:nvPicPr>
+          <p:cNvPr id="3" name="Picture 2">
+            <a:extLst>
+              <a:ext uri="{FF2B5EF4-FFF2-40B4-BE49-F238E27FC236}">
+                <a16:creationId xmlns:a16="http://schemas.microsoft.com/office/drawing/2014/main" id="{28FBB3FA-7F5D-90E6-9A6A-218CD23B6B45}"/>
+              </a:ext>
+            </a:extLst>
+          </p:cNvPr>
+          <p:cNvPicPr>
+            <a:picLocks noChangeAspect="1"/>
+          </p:cNvPicPr>
+          <p:nvPr/>
+        </p:nvPicPr>
+        <p:blipFill>
+          <a:blip r:embed="rId2"/>
+          <a:stretch>
+            <a:fillRect/>
+          </a:stretch>
+        </p:blipFill>
+        <p:spPr>
+          <a:xfrm>
+            <a:off x="8675" y="785443"/>
+            <a:ext cx="12174649" cy="5287113"/>
+          </a:xfrm>
+          <a:prstGeom prst="rect">
+            <a:avLst/>
+          </a:prstGeom>
+        </p:spPr>
+      </p:pic>
+    </p:spTree>
+    <p:extLst>
+      <p:ext uri="{BB962C8B-B14F-4D97-AF65-F5344CB8AC3E}">
+        <p14:creationId xmlns:p14="http://schemas.microsoft.com/office/powerpoint/2010/main" val="1937090758"/>
+      </p:ext>
+    </p:extLst>
+  </p:cSld>
+  <p:clrMapOvr>
+    <a:masterClrMapping/>
+  </p:clrMapOvr>
+</p:sld>
+</file>
+
+<file path=ppt/slides/slide34.xml><?xml version="1.0" encoding="utf-8"?>
+<p:sld xmlns:a="http://schemas.openxmlformats.org/drawingml/2006/main" xmlns:r="http://schemas.openxmlformats.org/officeDocument/2006/relationships" xmlns:p="http://schemas.openxmlformats.org/presentationml/2006/main">
+  <p:cSld>
+    <p:spTree>
+      <p:nvGrpSpPr>
+        <p:cNvPr id="1" name=""/>
+        <p:cNvGrpSpPr/>
+        <p:nvPr/>
+      </p:nvGrpSpPr>
+      <p:grpSpPr>
+        <a:xfrm>
+          <a:off x="0" y="0"/>
+          <a:ext cx="0" cy="0"/>
+          <a:chOff x="0" y="0"/>
+          <a:chExt cx="0" cy="0"/>
+        </a:xfrm>
+      </p:grpSpPr>
+      <p:pic>
+        <p:nvPicPr>
+          <p:cNvPr id="3" name="Picture 2">
+            <a:extLst>
+              <a:ext uri="{FF2B5EF4-FFF2-40B4-BE49-F238E27FC236}">
+                <a16:creationId xmlns:a16="http://schemas.microsoft.com/office/drawing/2014/main" id="{5AC141D1-3B13-8238-0C8D-50CA7D87D229}"/>
+              </a:ext>
+            </a:extLst>
+          </p:cNvPr>
+          <p:cNvPicPr>
+            <a:picLocks noChangeAspect="1"/>
+          </p:cNvPicPr>
+          <p:nvPr/>
+        </p:nvPicPr>
+        <p:blipFill>
+          <a:blip r:embed="rId2"/>
+          <a:stretch>
+            <a:fillRect/>
+          </a:stretch>
+        </p:blipFill>
+        <p:spPr>
+          <a:xfrm>
+            <a:off x="42017" y="1180786"/>
+            <a:ext cx="12107965" cy="4496427"/>
+          </a:xfrm>
+          <a:prstGeom prst="rect">
+            <a:avLst/>
+          </a:prstGeom>
+        </p:spPr>
+      </p:pic>
+    </p:spTree>
+    <p:extLst>
+      <p:ext uri="{BB962C8B-B14F-4D97-AF65-F5344CB8AC3E}">
+        <p14:creationId xmlns:p14="http://schemas.microsoft.com/office/powerpoint/2010/main" val="494099880"/>
+      </p:ext>
+    </p:extLst>
+  </p:cSld>
+  <p:clrMapOvr>
+    <a:masterClrMapping/>
+  </p:clrMapOvr>
+</p:sld>
+</file>
+
+<file path=ppt/slides/slide35.xml><?xml version="1.0" encoding="utf-8"?>
+<p:sld xmlns:a="http://schemas.openxmlformats.org/drawingml/2006/main" xmlns:r="http://schemas.openxmlformats.org/officeDocument/2006/relationships" xmlns:p="http://schemas.openxmlformats.org/presentationml/2006/main">
+  <p:cSld>
+    <p:spTree>
+      <p:nvGrpSpPr>
+        <p:cNvPr id="1" name=""/>
+        <p:cNvGrpSpPr/>
+        <p:nvPr/>
+      </p:nvGrpSpPr>
+      <p:grpSpPr>
+        <a:xfrm>
+          <a:off x="0" y="0"/>
+          <a:ext cx="0" cy="0"/>
+          <a:chOff x="0" y="0"/>
+          <a:chExt cx="0" cy="0"/>
+        </a:xfrm>
+      </p:grpSpPr>
+      <p:pic>
+        <p:nvPicPr>
+          <p:cNvPr id="3" name="Picture 2">
+            <a:extLst>
+              <a:ext uri="{FF2B5EF4-FFF2-40B4-BE49-F238E27FC236}">
+                <a16:creationId xmlns:a16="http://schemas.microsoft.com/office/drawing/2014/main" id="{2D08A6B0-AFB7-8092-2339-BAFCEBD93CBA}"/>
+              </a:ext>
+            </a:extLst>
+          </p:cNvPr>
+          <p:cNvPicPr>
+            <a:picLocks noChangeAspect="1"/>
+          </p:cNvPicPr>
+          <p:nvPr/>
+        </p:nvPicPr>
+        <p:blipFill>
+          <a:blip r:embed="rId2"/>
+          <a:stretch>
+            <a:fillRect/>
+          </a:stretch>
+        </p:blipFill>
+        <p:spPr>
+          <a:xfrm>
+            <a:off x="0" y="884381"/>
+            <a:ext cx="12192000" cy="5089237"/>
+          </a:xfrm>
+          <a:prstGeom prst="rect">
+            <a:avLst/>
+          </a:prstGeom>
+        </p:spPr>
+      </p:pic>
+    </p:spTree>
+    <p:extLst>
+      <p:ext uri="{BB962C8B-B14F-4D97-AF65-F5344CB8AC3E}">
+        <p14:creationId xmlns:p14="http://schemas.microsoft.com/office/powerpoint/2010/main" val="1458716541"/>
+      </p:ext>
+    </p:extLst>
+  </p:cSld>
+  <p:clrMapOvr>
+    <a:masterClrMapping/>
+  </p:clrMapOvr>
+</p:sld>
+</file>
+
+<file path=ppt/slides/slide36.xml><?xml version="1.0" encoding="utf-8"?>
+<p:sld xmlns:a="http://schemas.openxmlformats.org/drawingml/2006/main" xmlns:r="http://schemas.openxmlformats.org/officeDocument/2006/relationships" xmlns:p="http://schemas.openxmlformats.org/presentationml/2006/main">
+  <p:cSld>
+    <p:spTree>
+      <p:nvGrpSpPr>
+        <p:cNvPr id="1" name=""/>
+        <p:cNvGrpSpPr/>
+        <p:nvPr/>
+      </p:nvGrpSpPr>
+      <p:grpSpPr>
+        <a:xfrm>
+          <a:off x="0" y="0"/>
+          <a:ext cx="0" cy="0"/>
+          <a:chOff x="0" y="0"/>
+          <a:chExt cx="0" cy="0"/>
+        </a:xfrm>
+      </p:grpSpPr>
       <p:sp>
         <p:nvSpPr>
           <p:cNvPr id="3" name="TextBox 2">
@@ -15126,7 +15431,7 @@
 </p:sld>
 </file>
 
-<file path=ppt/slides/slide32.xml><?xml version="1.0" encoding="utf-8"?>
+<file path=ppt/slides/slide37.xml><?xml version="1.0" encoding="utf-8"?>
 <p:sld xmlns:a="http://schemas.openxmlformats.org/drawingml/2006/main" xmlns:r="http://schemas.openxmlformats.org/officeDocument/2006/relationships" xmlns:p="http://schemas.openxmlformats.org/presentationml/2006/main">
   <p:cSld>
     <p:spTree>

--- a/documents/Solar_Anomaly_Detection_Presentation.pptx
+++ b/documents/Solar_Anomaly_Detection_Presentation.pptx
@@ -35,13 +35,14 @@
     <p:sldId id="279" r:id="rId29"/>
     <p:sldId id="280" r:id="rId30"/>
     <p:sldId id="281" r:id="rId31"/>
-    <p:sldId id="291" r:id="rId32"/>
-    <p:sldId id="289" r:id="rId33"/>
-    <p:sldId id="290" r:id="rId34"/>
-    <p:sldId id="292" r:id="rId35"/>
-    <p:sldId id="293" r:id="rId36"/>
-    <p:sldId id="283" r:id="rId37"/>
-    <p:sldId id="288" r:id="rId38"/>
+    <p:sldId id="294" r:id="rId32"/>
+    <p:sldId id="291" r:id="rId33"/>
+    <p:sldId id="289" r:id="rId34"/>
+    <p:sldId id="290" r:id="rId35"/>
+    <p:sldId id="292" r:id="rId36"/>
+    <p:sldId id="293" r:id="rId37"/>
+    <p:sldId id="283" r:id="rId38"/>
+    <p:sldId id="288" r:id="rId39"/>
   </p:sldIdLst>
   <p:sldSz cx="12192000" cy="6858000"/>
   <p:notesSz cx="6858000" cy="9144000"/>
@@ -4665,6 +4666,7 @@
                         </a:defRPr>
                       </a:pPr>
                       <a:r>
+                        <a:rPr dirty="0"/>
                         <a:t>Isolation Forest</a:t>
                       </a:r>
                     </a:p>
@@ -4756,6 +4758,7 @@
                         </a:defRPr>
                       </a:pPr>
                       <a:r>
+                        <a:rPr dirty="0"/>
                         <a:t>Random Forest</a:t>
                       </a:r>
                     </a:p>
@@ -4856,6 +4859,7 @@
                         </a:defRPr>
                       </a:pPr>
                       <a:r>
+                        <a:rPr dirty="0"/>
                         <a:t>LSTM</a:t>
                       </a:r>
                     </a:p>
@@ -4949,6 +4953,7 @@
                         </a:defRPr>
                       </a:pPr>
                       <a:r>
+                        <a:rPr dirty="0"/>
                         <a:t>CNN-LSTM</a:t>
                       </a:r>
                     </a:p>
@@ -4997,6 +5002,7 @@
                         </a:defRPr>
                       </a:pPr>
                       <a:r>
+                        <a:rPr dirty="0"/>
                         <a:t>CNN extracts local features + LSTM captures time dynamics</a:t>
                       </a:r>
                     </a:p>
@@ -5048,6 +5054,7 @@
                         </a:defRPr>
                       </a:pPr>
                       <a:r>
+                        <a:rPr dirty="0"/>
                         <a:t>LSTM Autoencoder</a:t>
                       </a:r>
                     </a:p>
@@ -5139,6 +5146,7 @@
                         </a:defRPr>
                       </a:pPr>
                       <a:r>
+                        <a:rPr dirty="0"/>
                         <a:t>Transformer</a:t>
                       </a:r>
                     </a:p>
@@ -14996,6 +15004,66 @@
           <p:cNvPr id="3" name="Picture 2">
             <a:extLst>
               <a:ext uri="{FF2B5EF4-FFF2-40B4-BE49-F238E27FC236}">
+                <a16:creationId xmlns:a16="http://schemas.microsoft.com/office/drawing/2014/main" id="{24E29953-1867-F544-858E-D0DF6C4B93F1}"/>
+              </a:ext>
+            </a:extLst>
+          </p:cNvPr>
+          <p:cNvPicPr>
+            <a:picLocks noChangeAspect="1"/>
+          </p:cNvPicPr>
+          <p:nvPr/>
+        </p:nvPicPr>
+        <p:blipFill>
+          <a:blip r:embed="rId2"/>
+          <a:stretch>
+            <a:fillRect/>
+          </a:stretch>
+        </p:blipFill>
+        <p:spPr>
+          <a:xfrm>
+            <a:off x="980361" y="866417"/>
+            <a:ext cx="10231278" cy="5125165"/>
+          </a:xfrm>
+          <a:prstGeom prst="rect">
+            <a:avLst/>
+          </a:prstGeom>
+        </p:spPr>
+      </p:pic>
+    </p:spTree>
+    <p:extLst>
+      <p:ext uri="{BB962C8B-B14F-4D97-AF65-F5344CB8AC3E}">
+        <p14:creationId xmlns:p14="http://schemas.microsoft.com/office/powerpoint/2010/main" val="409713609"/>
+      </p:ext>
+    </p:extLst>
+  </p:cSld>
+  <p:clrMapOvr>
+    <a:masterClrMapping/>
+  </p:clrMapOvr>
+</p:sld>
+</file>
+
+<file path=ppt/slides/slide32.xml><?xml version="1.0" encoding="utf-8"?>
+<p:sld xmlns:a="http://schemas.openxmlformats.org/drawingml/2006/main" xmlns:r="http://schemas.openxmlformats.org/officeDocument/2006/relationships" xmlns:p="http://schemas.openxmlformats.org/presentationml/2006/main">
+  <p:cSld>
+    <p:spTree>
+      <p:nvGrpSpPr>
+        <p:cNvPr id="1" name=""/>
+        <p:cNvGrpSpPr/>
+        <p:nvPr/>
+      </p:nvGrpSpPr>
+      <p:grpSpPr>
+        <a:xfrm>
+          <a:off x="0" y="0"/>
+          <a:ext cx="0" cy="0"/>
+          <a:chOff x="0" y="0"/>
+          <a:chExt cx="0" cy="0"/>
+        </a:xfrm>
+      </p:grpSpPr>
+      <p:pic>
+        <p:nvPicPr>
+          <p:cNvPr id="3" name="Picture 2">
+            <a:extLst>
+              <a:ext uri="{FF2B5EF4-FFF2-40B4-BE49-F238E27FC236}">
                 <a16:creationId xmlns:a16="http://schemas.microsoft.com/office/drawing/2014/main" id="{21FB576C-9805-E5B4-818F-F456F11EA6D8}"/>
               </a:ext>
             </a:extLst>
@@ -15034,7 +15102,7 @@
 </p:sld>
 </file>
 
-<file path=ppt/slides/slide32.xml><?xml version="1.0" encoding="utf-8"?>
+<file path=ppt/slides/slide33.xml><?xml version="1.0" encoding="utf-8"?>
 <p:sld xmlns:a="http://schemas.openxmlformats.org/drawingml/2006/main" xmlns:r="http://schemas.openxmlformats.org/officeDocument/2006/relationships" xmlns:p="http://schemas.openxmlformats.org/presentationml/2006/main">
   <p:cSld>
     <p:spTree>
@@ -15094,7 +15162,7 @@
 </p:sld>
 </file>
 
-<file path=ppt/slides/slide33.xml><?xml version="1.0" encoding="utf-8"?>
+<file path=ppt/slides/slide34.xml><?xml version="1.0" encoding="utf-8"?>
 <p:sld xmlns:a="http://schemas.openxmlformats.org/drawingml/2006/main" xmlns:r="http://schemas.openxmlformats.org/officeDocument/2006/relationships" xmlns:p="http://schemas.openxmlformats.org/presentationml/2006/main">
   <p:cSld>
     <p:spTree>
@@ -15154,7 +15222,7 @@
 </p:sld>
 </file>
 
-<file path=ppt/slides/slide34.xml><?xml version="1.0" encoding="utf-8"?>
+<file path=ppt/slides/slide35.xml><?xml version="1.0" encoding="utf-8"?>
 <p:sld xmlns:a="http://schemas.openxmlformats.org/drawingml/2006/main" xmlns:r="http://schemas.openxmlformats.org/officeDocument/2006/relationships" xmlns:p="http://schemas.openxmlformats.org/presentationml/2006/main">
   <p:cSld>
     <p:spTree>
@@ -15214,7 +15282,7 @@
 </p:sld>
 </file>
 
-<file path=ppt/slides/slide35.xml><?xml version="1.0" encoding="utf-8"?>
+<file path=ppt/slides/slide36.xml><?xml version="1.0" encoding="utf-8"?>
 <p:sld xmlns:a="http://schemas.openxmlformats.org/drawingml/2006/main" xmlns:r="http://schemas.openxmlformats.org/officeDocument/2006/relationships" xmlns:p="http://schemas.openxmlformats.org/presentationml/2006/main">
   <p:cSld>
     <p:spTree>
@@ -15274,7 +15342,7 @@
 </p:sld>
 </file>
 
-<file path=ppt/slides/slide36.xml><?xml version="1.0" encoding="utf-8"?>
+<file path=ppt/slides/slide37.xml><?xml version="1.0" encoding="utf-8"?>
 <p:sld xmlns:a="http://schemas.openxmlformats.org/drawingml/2006/main" xmlns:r="http://schemas.openxmlformats.org/officeDocument/2006/relationships" xmlns:p="http://schemas.openxmlformats.org/presentationml/2006/main">
   <p:cSld>
     <p:spTree>
@@ -15431,7 +15499,7 @@
 </p:sld>
 </file>
 
-<file path=ppt/slides/slide37.xml><?xml version="1.0" encoding="utf-8"?>
+<file path=ppt/slides/slide38.xml><?xml version="1.0" encoding="utf-8"?>
 <p:sld xmlns:a="http://schemas.openxmlformats.org/drawingml/2006/main" xmlns:r="http://schemas.openxmlformats.org/officeDocument/2006/relationships" xmlns:p="http://schemas.openxmlformats.org/presentationml/2006/main">
   <p:cSld>
     <p:spTree>

--- a/documents/Solar_Anomaly_Detection_Presentation.pptx
+++ b/documents/Solar_Anomaly_Detection_Presentation.pptx
@@ -35,14 +35,16 @@
     <p:sldId id="279" r:id="rId29"/>
     <p:sldId id="280" r:id="rId30"/>
     <p:sldId id="281" r:id="rId31"/>
-    <p:sldId id="294" r:id="rId32"/>
-    <p:sldId id="291" r:id="rId33"/>
-    <p:sldId id="289" r:id="rId34"/>
-    <p:sldId id="290" r:id="rId35"/>
-    <p:sldId id="292" r:id="rId36"/>
-    <p:sldId id="293" r:id="rId37"/>
-    <p:sldId id="283" r:id="rId38"/>
-    <p:sldId id="288" r:id="rId39"/>
+    <p:sldId id="295" r:id="rId32"/>
+    <p:sldId id="296" r:id="rId33"/>
+    <p:sldId id="294" r:id="rId34"/>
+    <p:sldId id="291" r:id="rId35"/>
+    <p:sldId id="289" r:id="rId36"/>
+    <p:sldId id="290" r:id="rId37"/>
+    <p:sldId id="292" r:id="rId38"/>
+    <p:sldId id="293" r:id="rId39"/>
+    <p:sldId id="283" r:id="rId40"/>
+    <p:sldId id="288" r:id="rId41"/>
   </p:sldIdLst>
   <p:sldSz cx="12192000" cy="6858000"/>
   <p:notesSz cx="6858000" cy="9144000"/>
@@ -15004,6 +15006,126 @@
           <p:cNvPr id="3" name="Picture 2">
             <a:extLst>
               <a:ext uri="{FF2B5EF4-FFF2-40B4-BE49-F238E27FC236}">
+                <a16:creationId xmlns:a16="http://schemas.microsoft.com/office/drawing/2014/main" id="{6582837B-85EC-94BE-1FB9-848986C7A6B9}"/>
+              </a:ext>
+            </a:extLst>
+          </p:cNvPr>
+          <p:cNvPicPr>
+            <a:picLocks noChangeAspect="1"/>
+          </p:cNvPicPr>
+          <p:nvPr/>
+        </p:nvPicPr>
+        <p:blipFill>
+          <a:blip r:embed="rId2"/>
+          <a:stretch>
+            <a:fillRect/>
+          </a:stretch>
+        </p:blipFill>
+        <p:spPr>
+          <a:xfrm>
+            <a:off x="966071" y="1628523"/>
+            <a:ext cx="10259857" cy="3600953"/>
+          </a:xfrm>
+          <a:prstGeom prst="rect">
+            <a:avLst/>
+          </a:prstGeom>
+        </p:spPr>
+      </p:pic>
+    </p:spTree>
+    <p:extLst>
+      <p:ext uri="{BB962C8B-B14F-4D97-AF65-F5344CB8AC3E}">
+        <p14:creationId xmlns:p14="http://schemas.microsoft.com/office/powerpoint/2010/main" val="3859765131"/>
+      </p:ext>
+    </p:extLst>
+  </p:cSld>
+  <p:clrMapOvr>
+    <a:masterClrMapping/>
+  </p:clrMapOvr>
+</p:sld>
+</file>
+
+<file path=ppt/slides/slide32.xml><?xml version="1.0" encoding="utf-8"?>
+<p:sld xmlns:a="http://schemas.openxmlformats.org/drawingml/2006/main" xmlns:r="http://schemas.openxmlformats.org/officeDocument/2006/relationships" xmlns:p="http://schemas.openxmlformats.org/presentationml/2006/main">
+  <p:cSld>
+    <p:spTree>
+      <p:nvGrpSpPr>
+        <p:cNvPr id="1" name=""/>
+        <p:cNvGrpSpPr/>
+        <p:nvPr/>
+      </p:nvGrpSpPr>
+      <p:grpSpPr>
+        <a:xfrm>
+          <a:off x="0" y="0"/>
+          <a:ext cx="0" cy="0"/>
+          <a:chOff x="0" y="0"/>
+          <a:chExt cx="0" cy="0"/>
+        </a:xfrm>
+      </p:grpSpPr>
+      <p:pic>
+        <p:nvPicPr>
+          <p:cNvPr id="3" name="Picture 2">
+            <a:extLst>
+              <a:ext uri="{FF2B5EF4-FFF2-40B4-BE49-F238E27FC236}">
+                <a16:creationId xmlns:a16="http://schemas.microsoft.com/office/drawing/2014/main" id="{6B889A0B-FDAB-2501-8A62-7E5AAA113567}"/>
+              </a:ext>
+            </a:extLst>
+          </p:cNvPr>
+          <p:cNvPicPr>
+            <a:picLocks noChangeAspect="1"/>
+          </p:cNvPicPr>
+          <p:nvPr/>
+        </p:nvPicPr>
+        <p:blipFill>
+          <a:blip r:embed="rId2"/>
+          <a:stretch>
+            <a:fillRect/>
+          </a:stretch>
+        </p:blipFill>
+        <p:spPr>
+          <a:xfrm>
+            <a:off x="0" y="1694654"/>
+            <a:ext cx="12192000" cy="3468692"/>
+          </a:xfrm>
+          <a:prstGeom prst="rect">
+            <a:avLst/>
+          </a:prstGeom>
+        </p:spPr>
+      </p:pic>
+    </p:spTree>
+    <p:extLst>
+      <p:ext uri="{BB962C8B-B14F-4D97-AF65-F5344CB8AC3E}">
+        <p14:creationId xmlns:p14="http://schemas.microsoft.com/office/powerpoint/2010/main" val="1362502509"/>
+      </p:ext>
+    </p:extLst>
+  </p:cSld>
+  <p:clrMapOvr>
+    <a:masterClrMapping/>
+  </p:clrMapOvr>
+</p:sld>
+</file>
+
+<file path=ppt/slides/slide33.xml><?xml version="1.0" encoding="utf-8"?>
+<p:sld xmlns:a="http://schemas.openxmlformats.org/drawingml/2006/main" xmlns:r="http://schemas.openxmlformats.org/officeDocument/2006/relationships" xmlns:p="http://schemas.openxmlformats.org/presentationml/2006/main">
+  <p:cSld>
+    <p:spTree>
+      <p:nvGrpSpPr>
+        <p:cNvPr id="1" name=""/>
+        <p:cNvGrpSpPr/>
+        <p:nvPr/>
+      </p:nvGrpSpPr>
+      <p:grpSpPr>
+        <a:xfrm>
+          <a:off x="0" y="0"/>
+          <a:ext cx="0" cy="0"/>
+          <a:chOff x="0" y="0"/>
+          <a:chExt cx="0" cy="0"/>
+        </a:xfrm>
+      </p:grpSpPr>
+      <p:pic>
+        <p:nvPicPr>
+          <p:cNvPr id="3" name="Picture 2">
+            <a:extLst>
+              <a:ext uri="{FF2B5EF4-FFF2-40B4-BE49-F238E27FC236}">
                 <a16:creationId xmlns:a16="http://schemas.microsoft.com/office/drawing/2014/main" id="{24E29953-1867-F544-858E-D0DF6C4B93F1}"/>
               </a:ext>
             </a:extLst>
@@ -15042,7 +15164,7 @@
 </p:sld>
 </file>
 
-<file path=ppt/slides/slide32.xml><?xml version="1.0" encoding="utf-8"?>
+<file path=ppt/slides/slide34.xml><?xml version="1.0" encoding="utf-8"?>
 <p:sld xmlns:a="http://schemas.openxmlformats.org/drawingml/2006/main" xmlns:r="http://schemas.openxmlformats.org/officeDocument/2006/relationships" xmlns:p="http://schemas.openxmlformats.org/presentationml/2006/main">
   <p:cSld>
     <p:spTree>
@@ -15102,7 +15224,7 @@
 </p:sld>
 </file>
 
-<file path=ppt/slides/slide33.xml><?xml version="1.0" encoding="utf-8"?>
+<file path=ppt/slides/slide35.xml><?xml version="1.0" encoding="utf-8"?>
 <p:sld xmlns:a="http://schemas.openxmlformats.org/drawingml/2006/main" xmlns:r="http://schemas.openxmlformats.org/officeDocument/2006/relationships" xmlns:p="http://schemas.openxmlformats.org/presentationml/2006/main">
   <p:cSld>
     <p:spTree>
@@ -15162,7 +15284,7 @@
 </p:sld>
 </file>
 
-<file path=ppt/slides/slide34.xml><?xml version="1.0" encoding="utf-8"?>
+<file path=ppt/slides/slide36.xml><?xml version="1.0" encoding="utf-8"?>
 <p:sld xmlns:a="http://schemas.openxmlformats.org/drawingml/2006/main" xmlns:r="http://schemas.openxmlformats.org/officeDocument/2006/relationships" xmlns:p="http://schemas.openxmlformats.org/presentationml/2006/main">
   <p:cSld>
     <p:spTree>
@@ -15222,7 +15344,7 @@
 </p:sld>
 </file>
 
-<file path=ppt/slides/slide35.xml><?xml version="1.0" encoding="utf-8"?>
+<file path=ppt/slides/slide37.xml><?xml version="1.0" encoding="utf-8"?>
 <p:sld xmlns:a="http://schemas.openxmlformats.org/drawingml/2006/main" xmlns:r="http://schemas.openxmlformats.org/officeDocument/2006/relationships" xmlns:p="http://schemas.openxmlformats.org/presentationml/2006/main">
   <p:cSld>
     <p:spTree>
@@ -15282,7 +15404,7 @@
 </p:sld>
 </file>
 
-<file path=ppt/slides/slide36.xml><?xml version="1.0" encoding="utf-8"?>
+<file path=ppt/slides/slide38.xml><?xml version="1.0" encoding="utf-8"?>
 <p:sld xmlns:a="http://schemas.openxmlformats.org/drawingml/2006/main" xmlns:r="http://schemas.openxmlformats.org/officeDocument/2006/relationships" xmlns:p="http://schemas.openxmlformats.org/presentationml/2006/main">
   <p:cSld>
     <p:spTree>
@@ -15342,7 +15464,7 @@
 </p:sld>
 </file>
 
-<file path=ppt/slides/slide37.xml><?xml version="1.0" encoding="utf-8"?>
+<file path=ppt/slides/slide39.xml><?xml version="1.0" encoding="utf-8"?>
 <p:sld xmlns:a="http://schemas.openxmlformats.org/drawingml/2006/main" xmlns:r="http://schemas.openxmlformats.org/officeDocument/2006/relationships" xmlns:p="http://schemas.openxmlformats.org/presentationml/2006/main">
   <p:cSld>
     <p:spTree>
@@ -15499,7 +15621,156 @@
 </p:sld>
 </file>
 
-<file path=ppt/slides/slide38.xml><?xml version="1.0" encoding="utf-8"?>
+<file path=ppt/slides/slide4.xml><?xml version="1.0" encoding="utf-8"?>
+<p:sld xmlns:a="http://schemas.openxmlformats.org/drawingml/2006/main" xmlns:r="http://schemas.openxmlformats.org/officeDocument/2006/relationships" xmlns:p="http://schemas.openxmlformats.org/presentationml/2006/main">
+  <p:cSld>
+    <p:bg>
+      <p:bgPr>
+        <a:solidFill>
+          <a:srgbClr val="005080"/>
+        </a:solidFill>
+        <a:effectLst/>
+      </p:bgPr>
+    </p:bg>
+    <p:spTree>
+      <p:nvGrpSpPr>
+        <p:cNvPr id="1" name=""/>
+        <p:cNvGrpSpPr/>
+        <p:nvPr/>
+      </p:nvGrpSpPr>
+      <p:grpSpPr>
+        <a:xfrm>
+          <a:off x="0" y="0"/>
+          <a:ext cx="0" cy="0"/>
+          <a:chOff x="0" y="0"/>
+          <a:chExt cx="0" cy="0"/>
+        </a:xfrm>
+      </p:grpSpPr>
+      <p:sp>
+        <p:nvSpPr>
+          <p:cNvPr id="2" name="TextBox 1"/>
+          <p:cNvSpPr txBox="1"/>
+          <p:nvPr/>
+        </p:nvSpPr>
+        <p:spPr>
+          <a:xfrm>
+            <a:off x="914400" y="2011680"/>
+            <a:ext cx="10058400" cy="1371600"/>
+          </a:xfrm>
+          <a:prstGeom prst="rect">
+            <a:avLst/>
+          </a:prstGeom>
+          <a:noFill/>
+        </p:spPr>
+        <p:txBody>
+          <a:bodyPr wrap="square">
+            <a:spAutoFit/>
+          </a:bodyPr>
+          <a:lstStyle/>
+          <a:p>
+            <a:pPr algn="ctr">
+              <a:defRPr sz="4400" b="1">
+                <a:solidFill>
+                  <a:srgbClr val="FFFFFF"/>
+                </a:solidFill>
+                <a:latin typeface="Calibri"/>
+              </a:defRPr>
+            </a:pPr>
+            <a:r>
+              <a:t>Exploratory Data Analysis</a:t>
+            </a:r>
+          </a:p>
+        </p:txBody>
+      </p:sp>
+      <p:sp>
+        <p:nvSpPr>
+          <p:cNvPr id="3" name="TextBox 2"/>
+          <p:cNvSpPr txBox="1"/>
+          <p:nvPr/>
+        </p:nvSpPr>
+        <p:spPr>
+          <a:xfrm>
+            <a:off x="914400" y="3474720"/>
+            <a:ext cx="10058400" cy="914400"/>
+          </a:xfrm>
+          <a:prstGeom prst="rect">
+            <a:avLst/>
+          </a:prstGeom>
+          <a:noFill/>
+        </p:spPr>
+        <p:txBody>
+          <a:bodyPr wrap="square">
+            <a:spAutoFit/>
+          </a:bodyPr>
+          <a:lstStyle/>
+          <a:p>
+            <a:pPr algn="ctr">
+              <a:defRPr sz="2200" b="0">
+                <a:solidFill>
+                  <a:srgbClr val="CCCCCC"/>
+                </a:solidFill>
+                <a:latin typeface="Calibri"/>
+              </a:defRPr>
+            </a:pPr>
+            <a:r>
+              <a:t>Understanding the data before modeling</a:t>
+            </a:r>
+          </a:p>
+        </p:txBody>
+      </p:sp>
+      <p:sp>
+        <p:nvSpPr>
+          <p:cNvPr id="4" name="Rectangle 3"/>
+          <p:cNvSpPr/>
+          <p:nvPr/>
+        </p:nvSpPr>
+        <p:spPr>
+          <a:xfrm>
+            <a:off x="3657600" y="3246120"/>
+            <a:ext cx="4572000" cy="38100"/>
+          </a:xfrm>
+          <a:prstGeom prst="rect">
+            <a:avLst/>
+          </a:prstGeom>
+          <a:solidFill>
+            <a:srgbClr val="FF8C00"/>
+          </a:solidFill>
+          <a:ln>
+            <a:noFill/>
+          </a:ln>
+        </p:spPr>
+        <p:style>
+          <a:lnRef idx="1">
+            <a:schemeClr val="accent1"/>
+          </a:lnRef>
+          <a:fillRef idx="3">
+            <a:schemeClr val="accent1"/>
+          </a:fillRef>
+          <a:effectRef idx="2">
+            <a:schemeClr val="accent1"/>
+          </a:effectRef>
+          <a:fontRef idx="minor">
+            <a:schemeClr val="lt1"/>
+          </a:fontRef>
+        </p:style>
+        <p:txBody>
+          <a:bodyPr rtlCol="0" anchor="ctr"/>
+          <a:lstStyle/>
+          <a:p>
+            <a:pPr algn="ctr"/>
+            <a:endParaRPr/>
+          </a:p>
+        </p:txBody>
+      </p:sp>
+    </p:spTree>
+  </p:cSld>
+  <p:clrMapOvr>
+    <a:masterClrMapping/>
+  </p:clrMapOvr>
+</p:sld>
+</file>
+
+<file path=ppt/slides/slide40.xml><?xml version="1.0" encoding="utf-8"?>
 <p:sld xmlns:a="http://schemas.openxmlformats.org/drawingml/2006/main" xmlns:r="http://schemas.openxmlformats.org/officeDocument/2006/relationships" xmlns:p="http://schemas.openxmlformats.org/presentationml/2006/main">
   <p:cSld>
     <p:spTree>
@@ -15616,155 +15887,6 @@
         <p14:creationId xmlns:p14="http://schemas.microsoft.com/office/powerpoint/2010/main" val="2396722886"/>
       </p:ext>
     </p:extLst>
-  </p:cSld>
-  <p:clrMapOvr>
-    <a:masterClrMapping/>
-  </p:clrMapOvr>
-</p:sld>
-</file>
-
-<file path=ppt/slides/slide4.xml><?xml version="1.0" encoding="utf-8"?>
-<p:sld xmlns:a="http://schemas.openxmlformats.org/drawingml/2006/main" xmlns:r="http://schemas.openxmlformats.org/officeDocument/2006/relationships" xmlns:p="http://schemas.openxmlformats.org/presentationml/2006/main">
-  <p:cSld>
-    <p:bg>
-      <p:bgPr>
-        <a:solidFill>
-          <a:srgbClr val="005080"/>
-        </a:solidFill>
-        <a:effectLst/>
-      </p:bgPr>
-    </p:bg>
-    <p:spTree>
-      <p:nvGrpSpPr>
-        <p:cNvPr id="1" name=""/>
-        <p:cNvGrpSpPr/>
-        <p:nvPr/>
-      </p:nvGrpSpPr>
-      <p:grpSpPr>
-        <a:xfrm>
-          <a:off x="0" y="0"/>
-          <a:ext cx="0" cy="0"/>
-          <a:chOff x="0" y="0"/>
-          <a:chExt cx="0" cy="0"/>
-        </a:xfrm>
-      </p:grpSpPr>
-      <p:sp>
-        <p:nvSpPr>
-          <p:cNvPr id="2" name="TextBox 1"/>
-          <p:cNvSpPr txBox="1"/>
-          <p:nvPr/>
-        </p:nvSpPr>
-        <p:spPr>
-          <a:xfrm>
-            <a:off x="914400" y="2011680"/>
-            <a:ext cx="10058400" cy="1371600"/>
-          </a:xfrm>
-          <a:prstGeom prst="rect">
-            <a:avLst/>
-          </a:prstGeom>
-          <a:noFill/>
-        </p:spPr>
-        <p:txBody>
-          <a:bodyPr wrap="square">
-            <a:spAutoFit/>
-          </a:bodyPr>
-          <a:lstStyle/>
-          <a:p>
-            <a:pPr algn="ctr">
-              <a:defRPr sz="4400" b="1">
-                <a:solidFill>
-                  <a:srgbClr val="FFFFFF"/>
-                </a:solidFill>
-                <a:latin typeface="Calibri"/>
-              </a:defRPr>
-            </a:pPr>
-            <a:r>
-              <a:t>Exploratory Data Analysis</a:t>
-            </a:r>
-          </a:p>
-        </p:txBody>
-      </p:sp>
-      <p:sp>
-        <p:nvSpPr>
-          <p:cNvPr id="3" name="TextBox 2"/>
-          <p:cNvSpPr txBox="1"/>
-          <p:nvPr/>
-        </p:nvSpPr>
-        <p:spPr>
-          <a:xfrm>
-            <a:off x="914400" y="3474720"/>
-            <a:ext cx="10058400" cy="914400"/>
-          </a:xfrm>
-          <a:prstGeom prst="rect">
-            <a:avLst/>
-          </a:prstGeom>
-          <a:noFill/>
-        </p:spPr>
-        <p:txBody>
-          <a:bodyPr wrap="square">
-            <a:spAutoFit/>
-          </a:bodyPr>
-          <a:lstStyle/>
-          <a:p>
-            <a:pPr algn="ctr">
-              <a:defRPr sz="2200" b="0">
-                <a:solidFill>
-                  <a:srgbClr val="CCCCCC"/>
-                </a:solidFill>
-                <a:latin typeface="Calibri"/>
-              </a:defRPr>
-            </a:pPr>
-            <a:r>
-              <a:t>Understanding the data before modeling</a:t>
-            </a:r>
-          </a:p>
-        </p:txBody>
-      </p:sp>
-      <p:sp>
-        <p:nvSpPr>
-          <p:cNvPr id="4" name="Rectangle 3"/>
-          <p:cNvSpPr/>
-          <p:nvPr/>
-        </p:nvSpPr>
-        <p:spPr>
-          <a:xfrm>
-            <a:off x="3657600" y="3246120"/>
-            <a:ext cx="4572000" cy="38100"/>
-          </a:xfrm>
-          <a:prstGeom prst="rect">
-            <a:avLst/>
-          </a:prstGeom>
-          <a:solidFill>
-            <a:srgbClr val="FF8C00"/>
-          </a:solidFill>
-          <a:ln>
-            <a:noFill/>
-          </a:ln>
-        </p:spPr>
-        <p:style>
-          <a:lnRef idx="1">
-            <a:schemeClr val="accent1"/>
-          </a:lnRef>
-          <a:fillRef idx="3">
-            <a:schemeClr val="accent1"/>
-          </a:fillRef>
-          <a:effectRef idx="2">
-            <a:schemeClr val="accent1"/>
-          </a:effectRef>
-          <a:fontRef idx="minor">
-            <a:schemeClr val="lt1"/>
-          </a:fontRef>
-        </p:style>
-        <p:txBody>
-          <a:bodyPr rtlCol="0" anchor="ctr"/>
-          <a:lstStyle/>
-          <a:p>
-            <a:pPr algn="ctr"/>
-            <a:endParaRPr/>
-          </a:p>
-        </p:txBody>
-      </p:sp>
-    </p:spTree>
   </p:cSld>
   <p:clrMapOvr>
     <a:masterClrMapping/>
